--- a/classes/parte-17-profundizacion-para-certificaciones/322-threat-intelligence-operacional-avanzada/clase-322-presentacion.pptx
+++ b/classes/parte-17-profundizacion-para-certificaciones/322-threat-intelligence-operacional-avanzada/clase-322-presentacion.pptx
@@ -17,6 +17,10 @@
     <p:sldId id="265" r:id="rId16"/>
     <p:sldId id="266" r:id="rId17"/>
     <p:sldId id="267" r:id="rId18"/>
+    <p:sldId id="268" r:id="rId19"/>
+    <p:sldId id="269" r:id="rId20"/>
+    <p:sldId id="270" r:id="rId21"/>
+    <p:sldId id="271" r:id="rId22"/>
   </p:sldIdLst>
   <p:sldSz cx="9144000" cy="6858000" type="screen4x3"/>
   <p:notesSz cx="6858000" cy="9144000"/>
@@ -3198,7 +3202,7 @@
                   <a:srgbClr val="0B3D2E"/>
                 </a:solidFill>
               </a:rPr>
-              <a:t>⚠️ Errores comunes</a:t>
+              <a:t>🧪 Laboratorio guiado — Construir un playbook de threat intelligence</a:t>
             </a:r>
           </a:p>
         </p:txBody>
@@ -3236,82 +3240,97 @@
                   <a:srgbClr val="22282E"/>
                 </a:solidFill>
               </a:rPr>
-              <a:t>•  "Tengo miles de IOCs y ninguno sirve" — Recolectaste sin dirección. Empieza por el requisito de inteligencia y filtra lo relevante.</a:t>
-            </a:r>
-          </a:p>
-          <a:p>
-            <a:pPr>
-              <a:spcAft>
-                <a:spcPts val="600"/>
-              </a:spcAft>
-            </a:pPr>
-            <a:r>
-              <a:rPr sz="1500">
-                <a:solidFill>
-                  <a:srgbClr val="22282E"/>
-                </a:solidFill>
-              </a:rPr>
-              <a:t>•  "Bloqueé los hashes y el ataque volvió" — Los hashes están en la base de la pirámide; el atacante los cambia. Sube a detectar TTPs.</a:t>
-            </a:r>
-          </a:p>
-          <a:p>
-            <a:pPr>
-              <a:spcAft>
-                <a:spcPts val="600"/>
-              </a:spcAft>
-            </a:pPr>
-            <a:r>
-              <a:rPr sz="1500">
-                <a:solidFill>
-                  <a:srgbClr val="22282E"/>
-                </a:solidFill>
-              </a:rPr>
-              <a:t>•  "MISP está lleno pero nadie lo usa" — Falta integración y contexto. Etiqueta con TLP/ATT&amp;CK y expórtalo al SIEM/EDR.</a:t>
-            </a:r>
-          </a:p>
-          <a:p>
-            <a:pPr>
-              <a:spcAft>
-                <a:spcPts val="600"/>
-              </a:spcAft>
-            </a:pPr>
-            <a:r>
-              <a:rPr sz="1500">
-                <a:solidFill>
-                  <a:srgbClr val="22282E"/>
-                </a:solidFill>
-              </a:rPr>
-              <a:t>•  "Mapeé todo a ATT&amp;CK pero sin telemetría" — Mapear sin cruzar con logs no mide cobertura. Asocia cada técnica a una fuente de detección.</a:t>
-            </a:r>
-          </a:p>
-          <a:p>
-            <a:pPr>
-              <a:spcAft>
-                <a:spcPts val="600"/>
-              </a:spcAft>
-            </a:pPr>
-            <a:r>
-              <a:rPr sz="1500">
-                <a:solidFill>
-                  <a:srgbClr val="22282E"/>
-                </a:solidFill>
-              </a:rPr>
-              <a:t>•  "Confundo táctica y técnica" — Táctica = objetivo (por qué); técnica = método (cómo). Usa los IDs TA/T para no mezclarlos.</a:t>
-            </a:r>
-          </a:p>
-          <a:p>
-            <a:pPr>
-              <a:spcAft>
-                <a:spcPts val="600"/>
-              </a:spcAft>
-            </a:pPr>
-            <a:r>
-              <a:rPr sz="1500">
-                <a:solidFill>
-                  <a:srgbClr val="22282E"/>
-                </a:solidFill>
-              </a:rPr>
-              <a:t>•  "Mi informe estratégico está lleno de hashes" — Erraste la audiencia. La dirección necesita riesgo y tendencia, no indicadores crudos.</a:t>
+              <a:t>•  Ejercicio aplicado: a partir de un informe público de un grupo (ficticio o de ejemplo), produces un playbook de TI completo.</a:t>
+            </a:r>
+          </a:p>
+          <a:p>
+            <a:pPr>
+              <a:spcAft>
+                <a:spcPts val="600"/>
+              </a:spcAft>
+            </a:pPr>
+            <a:r>
+              <a:rPr sz="1500">
+                <a:solidFill>
+                  <a:srgbClr val="22282E"/>
+                </a:solidFill>
+              </a:rPr>
+              <a:t>•  Define los requisitos (Dirección). Escribe la pregunta de inteligencia: p. ej. "¿Está mi organización expuesta a las técnicas del grupo APT-X que ataca al sector financiero?". Sin esto, todo lo demás…</a:t>
+            </a:r>
+          </a:p>
+          <a:p>
+            <a:pPr>
+              <a:spcAft>
+                <a:spcPts val="600"/>
+              </a:spcAft>
+            </a:pPr>
+            <a:r>
+              <a:rPr sz="1500">
+                <a:solidFill>
+                  <a:srgbClr val="22282E"/>
+                </a:solidFill>
+              </a:rPr>
+              <a:t>•  Recolecta. Reúne el informe/CTI de ejemplo y extrae indicadores y comportamientos. Separa lo observable (IOCs) de los comportamientos (IOAs).</a:t>
+            </a:r>
+          </a:p>
+          <a:p>
+            <a:pPr>
+              <a:spcAft>
+                <a:spcPts val="600"/>
+              </a:spcAft>
+            </a:pPr>
+            <a:r>
+              <a:rPr sz="1500">
+                <a:solidFill>
+                  <a:srgbClr val="22282E"/>
+                </a:solidFill>
+              </a:rPr>
+              <a:t>•  Procesa en MISP. Crea un evento, añade atributos (dominios, hashes, IPs de ejemplo), etiqueta con taxonomías (tlp:amber, kill-chain) y galaxias (grupo/ATT&amp;CK).</a:t>
+            </a:r>
+          </a:p>
+          <a:p>
+            <a:pPr>
+              <a:spcAft>
+                <a:spcPts val="600"/>
+              </a:spcAft>
+            </a:pPr>
+            <a:r>
+              <a:rPr sz="1500">
+                <a:solidFill>
+                  <a:srgbClr val="22282E"/>
+                </a:solidFill>
+              </a:rPr>
+              <a:t>•  Analiza con la Pyramid of Pain. Clasifica cada indicador por nivel y decide dónde invertir: bloquear hashes es barato para el atacante; detectar TTPs le duele. Prioriza detecciones de comportamiento.</a:t>
+            </a:r>
+          </a:p>
+          <a:p>
+            <a:pPr>
+              <a:spcAft>
+                <a:spcPts val="600"/>
+              </a:spcAft>
+            </a:pPr>
+            <a:r>
+              <a:rPr sz="1500">
+                <a:solidFill>
+                  <a:srgbClr val="22282E"/>
+                </a:solidFill>
+              </a:rPr>
+              <a:t>•  Mapea a MITRE ATT&amp;CK. Lista las técnicas observadas (p. ej. T1566 phishing, T1059.001 PowerShell, T1486 cifrado). Construye una capa en ATT&amp;CK Navigator.</a:t>
+            </a:r>
+          </a:p>
+          <a:p>
+            <a:pPr>
+              <a:spcAft>
+                <a:spcPts val="600"/>
+              </a:spcAft>
+            </a:pPr>
+            <a:r>
+              <a:rPr sz="1500">
+                <a:solidFill>
+                  <a:srgbClr val="22282E"/>
+                </a:solidFill>
+              </a:rPr>
+              <a:t>•  Cruza con tu telemetría. Para cada técnica, anota qué fuente de log/regla la detectaría (EDR, Sysmon, proxy). Marca huecos de cobertura.</a:t>
             </a:r>
           </a:p>
         </p:txBody>
@@ -3362,7 +3381,7 @@
                   <a:srgbClr val="0B3D2E"/>
                 </a:solidFill>
               </a:rPr>
-              <a:t>❓ Preguntas frecuentes</a:t>
+              <a:t>✍️ Ejercicios</a:t>
             </a:r>
           </a:p>
         </p:txBody>
@@ -3400,97 +3419,82 @@
                   <a:srgbClr val="22282E"/>
                 </a:solidFill>
               </a:rPr>
-              <a:t>•  ❓ ¿Cuál es la diferencia práctica entre IOC e IOA?</a:t>
-            </a:r>
-          </a:p>
-          <a:p>
-            <a:pPr>
-              <a:spcAft>
-                <a:spcPts val="600"/>
-              </a:spcAft>
-            </a:pPr>
-            <a:r>
-              <a:rPr sz="1500">
-                <a:solidFill>
-                  <a:srgbClr val="22282E"/>
-                </a:solidFill>
-              </a:rPr>
-              <a:t>•  Un IOC dice "vi esta IP/hash" (pasado, fácil de cambiar); un IOA dice "estoy viendo a Word lanzar PowerShell codificado" (comportamiento, difícil de evadir). Las detecciones basadas en IOA envejecen mejor.</a:t>
-            </a:r>
-          </a:p>
-          <a:p>
-            <a:pPr>
-              <a:spcAft>
-                <a:spcPts val="600"/>
-              </a:spcAft>
-            </a:pPr>
-            <a:r>
-              <a:rPr sz="1500">
-                <a:solidFill>
-                  <a:srgbClr val="22282E"/>
-                </a:solidFill>
-              </a:rPr>
-              <a:t>•  ❓ ¿Por qué la Pyramid of Pain cambia mi estrategia?</a:t>
-            </a:r>
-          </a:p>
-          <a:p>
-            <a:pPr>
-              <a:spcAft>
-                <a:spcPts val="600"/>
-              </a:spcAft>
-            </a:pPr>
-            <a:r>
-              <a:rPr sz="1500">
-                <a:solidFill>
-                  <a:srgbClr val="22282E"/>
-                </a:solidFill>
-              </a:rPr>
-              <a:t>•  Porque revela dónde invertir: bloquear indicadores de la base es barato de evadir para el adversario; detectar sus TTPs (la cima) le obliga a rediseñar su operación. La defensa madura sube por la pirámide.</a:t>
-            </a:r>
-          </a:p>
-          <a:p>
-            <a:pPr>
-              <a:spcAft>
-                <a:spcPts val="600"/>
-              </a:spcAft>
-            </a:pPr>
-            <a:r>
-              <a:rPr sz="1500">
-                <a:solidFill>
-                  <a:srgbClr val="22282E"/>
-                </a:solidFill>
-              </a:rPr>
-              <a:t>•  ❓ ¿MISP u OpenCTI?</a:t>
-            </a:r>
-          </a:p>
-          <a:p>
-            <a:pPr>
-              <a:spcAft>
-                <a:spcPts val="600"/>
-              </a:spcAft>
-            </a:pPr>
-            <a:r>
-              <a:rPr sz="1500">
-                <a:solidFill>
-                  <a:srgbClr val="22282E"/>
-                </a:solidFill>
-              </a:rPr>
-              <a:t>•  MISP destaca en compartición de indicadores y comunidades; OpenCTI en modelado de conocimiento y relaciones. Muchas organizaciones usan MISP para IOCs y ATT&amp;CK/STIX como capa de conocimiento; no son excluyentes.</a:t>
-            </a:r>
-          </a:p>
-          <a:p>
-            <a:pPr>
-              <a:spcAft>
-                <a:spcPts val="600"/>
-              </a:spcAft>
-            </a:pPr>
-            <a:r>
-              <a:rPr sz="1500">
-                <a:solidFill>
-                  <a:srgbClr val="22282E"/>
-                </a:solidFill>
-              </a:rPr>
-              <a:t>•  ❓ ¿El Diamond Model reemplaza a la Cyber Kill Chain?</a:t>
+              <a:t>•  Clasifica diez indicadores dados como IOC o IOA y justifica cada uno.</a:t>
+            </a:r>
+          </a:p>
+          <a:p>
+            <a:pPr>
+              <a:spcAft>
+                <a:spcPts val="600"/>
+              </a:spcAft>
+            </a:pPr>
+            <a:r>
+              <a:rPr sz="1500">
+                <a:solidFill>
+                  <a:srgbClr val="22282E"/>
+                </a:solidFill>
+              </a:rPr>
+              <a:t>•  Ubica cinco indicadores en la Pyramid of Pain y explica la prioridad de defensa resultante.</a:t>
+            </a:r>
+          </a:p>
+          <a:p>
+            <a:pPr>
+              <a:spcAft>
+                <a:spcPts val="600"/>
+              </a:spcAft>
+            </a:pPr>
+            <a:r>
+              <a:rPr sz="1500">
+                <a:solidFill>
+                  <a:srgbClr val="22282E"/>
+                </a:solidFill>
+              </a:rPr>
+              <a:t>•  Crea un evento MISP con al menos cinco atributos, dos etiquetas de taxonomía y una galaxia de ATT&amp;CK.</a:t>
+            </a:r>
+          </a:p>
+          <a:p>
+            <a:pPr>
+              <a:spcAft>
+                <a:spcPts val="600"/>
+              </a:spcAft>
+            </a:pPr>
+            <a:r>
+              <a:rPr sz="1500">
+                <a:solidFill>
+                  <a:srgbClr val="22282E"/>
+                </a:solidFill>
+              </a:rPr>
+              <a:t>•  Mapea un informe de amenazas a seis técnicas de ATT&amp;CK y construye la capa en Navigator.</a:t>
+            </a:r>
+          </a:p>
+          <a:p>
+            <a:pPr>
+              <a:spcAft>
+                <a:spcPts val="600"/>
+              </a:spcAft>
+            </a:pPr>
+            <a:r>
+              <a:rPr sz="1500">
+                <a:solidFill>
+                  <a:srgbClr val="22282E"/>
+                </a:solidFill>
+              </a:rPr>
+              <a:t>•  Rellena un Diamond Model para una intrusión de ejemplo y describe un pivote posible por infraestructura.</a:t>
+            </a:r>
+          </a:p>
+          <a:p>
+            <a:pPr>
+              <a:spcAft>
+                <a:spcPts val="600"/>
+              </a:spcAft>
+            </a:pPr>
+            <a:r>
+              <a:rPr sz="1500">
+                <a:solidFill>
+                  <a:srgbClr val="22282E"/>
+                </a:solidFill>
+              </a:rPr>
+              <a:t>•  Redacta un producto de inteligencia estratégico (media página) para la dirección a partir de un informe táctico.</a:t>
             </a:r>
           </a:p>
         </p:txBody>
@@ -3541,7 +3545,7 @@
                   <a:srgbClr val="0B3D2E"/>
                 </a:solidFill>
               </a:rPr>
-              <a:t>🔗 Referencias</a:t>
+              <a:t>📝 Reto verificable</a:t>
             </a:r>
           </a:p>
         </p:txBody>
@@ -3579,6 +3583,528 @@
                   <a:srgbClr val="22282E"/>
                 </a:solidFill>
               </a:rPr>
+              <a:t>•  Reto: entrega un playbook de threat intelligence que convierta un informe de amenazas en detecciones y en productos para tres audiencias.</a:t>
+            </a:r>
+          </a:p>
+          <a:p>
+            <a:pPr>
+              <a:spcAft>
+                <a:spcPts val="600"/>
+              </a:spcAft>
+            </a:pPr>
+            <a:r>
+              <a:rPr sz="1500">
+                <a:solidFill>
+                  <a:srgbClr val="22282E"/>
+                </a:solidFill>
+              </a:rPr>
+              <a:t>•  Criterio de aceptación:</a:t>
+            </a:r>
+          </a:p>
+          <a:p>
+            <a:pPr>
+              <a:spcAft>
+                <a:spcPts val="600"/>
+              </a:spcAft>
+            </a:pPr>
+            <a:r>
+              <a:rPr sz="1500">
+                <a:solidFill>
+                  <a:srgbClr val="22282E"/>
+                </a:solidFill>
+              </a:rPr>
+              <a:t>•  El playbook parte de un requisito de inteligencia explícito (fase de Dirección).</a:t>
+            </a:r>
+          </a:p>
+          <a:p>
+            <a:pPr>
+              <a:spcAft>
+                <a:spcPts val="600"/>
+              </a:spcAft>
+            </a:pPr>
+            <a:r>
+              <a:rPr sz="1500">
+                <a:solidFill>
+                  <a:srgbClr val="22282E"/>
+                </a:solidFill>
+              </a:rPr>
+              <a:t>•  Los indicadores están separados en IOCs e IOAs y clasificados en la Pyramid of Pain con prioridad justificada.</a:t>
+            </a:r>
+          </a:p>
+          <a:p>
+            <a:pPr>
+              <a:spcAft>
+                <a:spcPts val="600"/>
+              </a:spcAft>
+            </a:pPr>
+            <a:r>
+              <a:rPr sz="1500">
+                <a:solidFill>
+                  <a:srgbClr val="22282E"/>
+                </a:solidFill>
+              </a:rPr>
+              <a:t>•  Existe un evento MISP con atributos, taxonomías (TLP) y galaxia de ATT&amp;CK.</a:t>
+            </a:r>
+          </a:p>
+          <a:p>
+            <a:pPr>
+              <a:spcAft>
+                <a:spcPts val="600"/>
+              </a:spcAft>
+            </a:pPr>
+            <a:r>
+              <a:rPr sz="1500">
+                <a:solidFill>
+                  <a:srgbClr val="22282E"/>
+                </a:solidFill>
+              </a:rPr>
+              <a:t>•  Hay una capa de MITRE ATT&amp;CK con al menos seis técnicas y su fuente de detección, señalando huecos de cobertura.</a:t>
+            </a:r>
+          </a:p>
+          <a:p>
+            <a:pPr>
+              <a:spcAft>
+                <a:spcPts val="600"/>
+              </a:spcAft>
+            </a:pPr>
+            <a:r>
+              <a:rPr sz="1500">
+                <a:solidFill>
+                  <a:srgbClr val="22282E"/>
+                </a:solidFill>
+              </a:rPr>
+              <a:t>•  Se incluye un Diamond Model con los cuatro vértices y un pivote propuesto, más tres productos de inteligencia (táctico, operacional, estratégico).</a:t>
+            </a:r>
+          </a:p>
+        </p:txBody>
+      </p:sp>
+    </p:spTree>
+  </p:cSld>
+  <p:clrMapOvr>
+    <a:masterClrMapping/>
+  </p:clrMapOvr>
+</p:sld>
+</file>
+
+<file path=ppt/slides/slide13.xml><?xml version="1.0" encoding="utf-8"?>
+<p:sld xmlns:a="http://schemas.openxmlformats.org/drawingml/2006/main" xmlns:p="http://schemas.openxmlformats.org/presentationml/2006/main" xmlns:r="http://schemas.openxmlformats.org/officeDocument/2006/relationships">
+  <p:cSld>
+    <p:spTree>
+      <p:nvGrpSpPr>
+        <p:cNvPr id="1" name=""/>
+        <p:cNvGrpSpPr/>
+        <p:nvPr/>
+      </p:nvGrpSpPr>
+      <p:grpSpPr/>
+      <p:sp>
+        <p:nvSpPr>
+          <p:cNvPr id="2" name="TextBox 1"/>
+          <p:cNvSpPr txBox="1"/>
+          <p:nvPr/>
+        </p:nvSpPr>
+        <p:spPr>
+          <a:xfrm>
+            <a:off x="457200" y="320040"/>
+            <a:ext cx="8229600" cy="822960"/>
+          </a:xfrm>
+          <a:prstGeom prst="rect">
+            <a:avLst/>
+          </a:prstGeom>
+          <a:noFill/>
+        </p:spPr>
+        <p:txBody>
+          <a:bodyPr wrap="square">
+            <a:spAutoFit/>
+          </a:bodyPr>
+          <a:lstStyle/>
+          <a:p>
+            <a:r>
+              <a:rPr sz="2600" b="1">
+                <a:solidFill>
+                  <a:srgbClr val="0B3D2E"/>
+                </a:solidFill>
+              </a:rPr>
+              <a:t>⚠️ Errores comunes</a:t>
+            </a:r>
+          </a:p>
+        </p:txBody>
+      </p:sp>
+      <p:sp>
+        <p:nvSpPr>
+          <p:cNvPr id="3" name="TextBox 2"/>
+          <p:cNvSpPr txBox="1"/>
+          <p:nvPr/>
+        </p:nvSpPr>
+        <p:spPr>
+          <a:xfrm>
+            <a:off x="457200" y="1280160"/>
+            <a:ext cx="8229600" cy="4937760"/>
+          </a:xfrm>
+          <a:prstGeom prst="rect">
+            <a:avLst/>
+          </a:prstGeom>
+          <a:noFill/>
+        </p:spPr>
+        <p:txBody>
+          <a:bodyPr wrap="square">
+            <a:spAutoFit/>
+          </a:bodyPr>
+          <a:lstStyle/>
+          <a:p>
+            <a:pPr>
+              <a:spcAft>
+                <a:spcPts val="600"/>
+              </a:spcAft>
+            </a:pPr>
+            <a:r>
+              <a:rPr sz="1500">
+                <a:solidFill>
+                  <a:srgbClr val="22282E"/>
+                </a:solidFill>
+              </a:rPr>
+              <a:t>•  "Tengo miles de IOCs y ninguno sirve" — Recolectaste sin dirección. Empieza por el requisito de inteligencia y filtra lo relevante.</a:t>
+            </a:r>
+          </a:p>
+          <a:p>
+            <a:pPr>
+              <a:spcAft>
+                <a:spcPts val="600"/>
+              </a:spcAft>
+            </a:pPr>
+            <a:r>
+              <a:rPr sz="1500">
+                <a:solidFill>
+                  <a:srgbClr val="22282E"/>
+                </a:solidFill>
+              </a:rPr>
+              <a:t>•  "Bloqueé los hashes y el ataque volvió" — Los hashes están en la base de la pirámide; el atacante los cambia. Sube a detectar TTPs.</a:t>
+            </a:r>
+          </a:p>
+          <a:p>
+            <a:pPr>
+              <a:spcAft>
+                <a:spcPts val="600"/>
+              </a:spcAft>
+            </a:pPr>
+            <a:r>
+              <a:rPr sz="1500">
+                <a:solidFill>
+                  <a:srgbClr val="22282E"/>
+                </a:solidFill>
+              </a:rPr>
+              <a:t>•  "MISP está lleno pero nadie lo usa" — Falta integración y contexto. Etiqueta con TLP/ATT&amp;CK y expórtalo al SIEM/EDR.</a:t>
+            </a:r>
+          </a:p>
+          <a:p>
+            <a:pPr>
+              <a:spcAft>
+                <a:spcPts val="600"/>
+              </a:spcAft>
+            </a:pPr>
+            <a:r>
+              <a:rPr sz="1500">
+                <a:solidFill>
+                  <a:srgbClr val="22282E"/>
+                </a:solidFill>
+              </a:rPr>
+              <a:t>•  "Mapeé todo a ATT&amp;CK pero sin telemetría" — Mapear sin cruzar con logs no mide cobertura. Asocia cada técnica a una fuente de detección.</a:t>
+            </a:r>
+          </a:p>
+          <a:p>
+            <a:pPr>
+              <a:spcAft>
+                <a:spcPts val="600"/>
+              </a:spcAft>
+            </a:pPr>
+            <a:r>
+              <a:rPr sz="1500">
+                <a:solidFill>
+                  <a:srgbClr val="22282E"/>
+                </a:solidFill>
+              </a:rPr>
+              <a:t>•  "Confundo táctica y técnica" — Táctica = objetivo (por qué); técnica = método (cómo). Usa los IDs TA/T para no mezclarlos.</a:t>
+            </a:r>
+          </a:p>
+          <a:p>
+            <a:pPr>
+              <a:spcAft>
+                <a:spcPts val="600"/>
+              </a:spcAft>
+            </a:pPr>
+            <a:r>
+              <a:rPr sz="1500">
+                <a:solidFill>
+                  <a:srgbClr val="22282E"/>
+                </a:solidFill>
+              </a:rPr>
+              <a:t>•  "Mi informe estratégico está lleno de hashes" — Erraste la audiencia. La dirección necesita riesgo y tendencia, no indicadores crudos.</a:t>
+            </a:r>
+          </a:p>
+        </p:txBody>
+      </p:sp>
+    </p:spTree>
+  </p:cSld>
+  <p:clrMapOvr>
+    <a:masterClrMapping/>
+  </p:clrMapOvr>
+</p:sld>
+</file>
+
+<file path=ppt/slides/slide14.xml><?xml version="1.0" encoding="utf-8"?>
+<p:sld xmlns:a="http://schemas.openxmlformats.org/drawingml/2006/main" xmlns:p="http://schemas.openxmlformats.org/presentationml/2006/main" xmlns:r="http://schemas.openxmlformats.org/officeDocument/2006/relationships">
+  <p:cSld>
+    <p:spTree>
+      <p:nvGrpSpPr>
+        <p:cNvPr id="1" name=""/>
+        <p:cNvGrpSpPr/>
+        <p:nvPr/>
+      </p:nvGrpSpPr>
+      <p:grpSpPr/>
+      <p:sp>
+        <p:nvSpPr>
+          <p:cNvPr id="2" name="TextBox 1"/>
+          <p:cNvSpPr txBox="1"/>
+          <p:nvPr/>
+        </p:nvSpPr>
+        <p:spPr>
+          <a:xfrm>
+            <a:off x="457200" y="320040"/>
+            <a:ext cx="8229600" cy="822960"/>
+          </a:xfrm>
+          <a:prstGeom prst="rect">
+            <a:avLst/>
+          </a:prstGeom>
+          <a:noFill/>
+        </p:spPr>
+        <p:txBody>
+          <a:bodyPr wrap="square">
+            <a:spAutoFit/>
+          </a:bodyPr>
+          <a:lstStyle/>
+          <a:p>
+            <a:r>
+              <a:rPr sz="2600" b="1">
+                <a:solidFill>
+                  <a:srgbClr val="0B3D2E"/>
+                </a:solidFill>
+              </a:rPr>
+              <a:t>❓ Preguntas frecuentes</a:t>
+            </a:r>
+          </a:p>
+        </p:txBody>
+      </p:sp>
+      <p:sp>
+        <p:nvSpPr>
+          <p:cNvPr id="3" name="TextBox 2"/>
+          <p:cNvSpPr txBox="1"/>
+          <p:nvPr/>
+        </p:nvSpPr>
+        <p:spPr>
+          <a:xfrm>
+            <a:off x="457200" y="1280160"/>
+            <a:ext cx="8229600" cy="4937760"/>
+          </a:xfrm>
+          <a:prstGeom prst="rect">
+            <a:avLst/>
+          </a:prstGeom>
+          <a:noFill/>
+        </p:spPr>
+        <p:txBody>
+          <a:bodyPr wrap="square">
+            <a:spAutoFit/>
+          </a:bodyPr>
+          <a:lstStyle/>
+          <a:p>
+            <a:pPr>
+              <a:spcAft>
+                <a:spcPts val="600"/>
+              </a:spcAft>
+            </a:pPr>
+            <a:r>
+              <a:rPr sz="1500">
+                <a:solidFill>
+                  <a:srgbClr val="22282E"/>
+                </a:solidFill>
+              </a:rPr>
+              <a:t>•  ❓ ¿Cuál es la diferencia práctica entre IOC e IOA?</a:t>
+            </a:r>
+          </a:p>
+          <a:p>
+            <a:pPr>
+              <a:spcAft>
+                <a:spcPts val="600"/>
+              </a:spcAft>
+            </a:pPr>
+            <a:r>
+              <a:rPr sz="1500">
+                <a:solidFill>
+                  <a:srgbClr val="22282E"/>
+                </a:solidFill>
+              </a:rPr>
+              <a:t>•  Un IOC dice "vi esta IP/hash" (pasado, fácil de cambiar); un IOA dice "estoy viendo a Word lanzar PowerShell codificado" (comportamiento, difícil de evadir). Las detecciones basadas en IOA envejecen…</a:t>
+            </a:r>
+          </a:p>
+          <a:p>
+            <a:pPr>
+              <a:spcAft>
+                <a:spcPts val="600"/>
+              </a:spcAft>
+            </a:pPr>
+            <a:r>
+              <a:rPr sz="1500">
+                <a:solidFill>
+                  <a:srgbClr val="22282E"/>
+                </a:solidFill>
+              </a:rPr>
+              <a:t>•  ❓ ¿Por qué la Pyramid of Pain cambia mi estrategia?</a:t>
+            </a:r>
+          </a:p>
+          <a:p>
+            <a:pPr>
+              <a:spcAft>
+                <a:spcPts val="600"/>
+              </a:spcAft>
+            </a:pPr>
+            <a:r>
+              <a:rPr sz="1500">
+                <a:solidFill>
+                  <a:srgbClr val="22282E"/>
+                </a:solidFill>
+              </a:rPr>
+              <a:t>•  Porque revela dónde invertir: bloquear indicadores de la base es barato de evadir para el adversario; detectar sus TTPs (la cima) le obliga a rediseñar su operación. La defensa madura sube por la…</a:t>
+            </a:r>
+          </a:p>
+          <a:p>
+            <a:pPr>
+              <a:spcAft>
+                <a:spcPts val="600"/>
+              </a:spcAft>
+            </a:pPr>
+            <a:r>
+              <a:rPr sz="1500">
+                <a:solidFill>
+                  <a:srgbClr val="22282E"/>
+                </a:solidFill>
+              </a:rPr>
+              <a:t>•  ❓ ¿MISP u OpenCTI?</a:t>
+            </a:r>
+          </a:p>
+          <a:p>
+            <a:pPr>
+              <a:spcAft>
+                <a:spcPts val="600"/>
+              </a:spcAft>
+            </a:pPr>
+            <a:r>
+              <a:rPr sz="1500">
+                <a:solidFill>
+                  <a:srgbClr val="22282E"/>
+                </a:solidFill>
+              </a:rPr>
+              <a:t>•  MISP destaca en compartición de indicadores y comunidades; OpenCTI en modelado de conocimiento y relaciones. Muchas organizaciones usan MISP para IOCs y ATT&amp;CK/STIX como capa de conocimiento; no son…</a:t>
+            </a:r>
+          </a:p>
+          <a:p>
+            <a:pPr>
+              <a:spcAft>
+                <a:spcPts val="600"/>
+              </a:spcAft>
+            </a:pPr>
+            <a:r>
+              <a:rPr sz="1500">
+                <a:solidFill>
+                  <a:srgbClr val="22282E"/>
+                </a:solidFill>
+              </a:rPr>
+              <a:t>•  ❓ ¿El Diamond Model reemplaza a la Cyber Kill Chain?</a:t>
+            </a:r>
+          </a:p>
+        </p:txBody>
+      </p:sp>
+    </p:spTree>
+  </p:cSld>
+  <p:clrMapOvr>
+    <a:masterClrMapping/>
+  </p:clrMapOvr>
+</p:sld>
+</file>
+
+<file path=ppt/slides/slide15.xml><?xml version="1.0" encoding="utf-8"?>
+<p:sld xmlns:a="http://schemas.openxmlformats.org/drawingml/2006/main" xmlns:p="http://schemas.openxmlformats.org/presentationml/2006/main" xmlns:r="http://schemas.openxmlformats.org/officeDocument/2006/relationships">
+  <p:cSld>
+    <p:spTree>
+      <p:nvGrpSpPr>
+        <p:cNvPr id="1" name=""/>
+        <p:cNvGrpSpPr/>
+        <p:nvPr/>
+      </p:nvGrpSpPr>
+      <p:grpSpPr/>
+      <p:sp>
+        <p:nvSpPr>
+          <p:cNvPr id="2" name="TextBox 1"/>
+          <p:cNvSpPr txBox="1"/>
+          <p:nvPr/>
+        </p:nvSpPr>
+        <p:spPr>
+          <a:xfrm>
+            <a:off x="457200" y="320040"/>
+            <a:ext cx="8229600" cy="822960"/>
+          </a:xfrm>
+          <a:prstGeom prst="rect">
+            <a:avLst/>
+          </a:prstGeom>
+          <a:noFill/>
+        </p:spPr>
+        <p:txBody>
+          <a:bodyPr wrap="square">
+            <a:spAutoFit/>
+          </a:bodyPr>
+          <a:lstStyle/>
+          <a:p>
+            <a:r>
+              <a:rPr sz="2600" b="1">
+                <a:solidFill>
+                  <a:srgbClr val="0B3D2E"/>
+                </a:solidFill>
+              </a:rPr>
+              <a:t>🔗 Referencias</a:t>
+            </a:r>
+          </a:p>
+        </p:txBody>
+      </p:sp>
+      <p:sp>
+        <p:nvSpPr>
+          <p:cNvPr id="3" name="TextBox 2"/>
+          <p:cNvSpPr txBox="1"/>
+          <p:nvPr/>
+        </p:nvSpPr>
+        <p:spPr>
+          <a:xfrm>
+            <a:off x="457200" y="1280160"/>
+            <a:ext cx="8229600" cy="4937760"/>
+          </a:xfrm>
+          <a:prstGeom prst="rect">
+            <a:avLst/>
+          </a:prstGeom>
+          <a:noFill/>
+        </p:spPr>
+        <p:txBody>
+          <a:bodyPr wrap="square">
+            <a:spAutoFit/>
+          </a:bodyPr>
+          <a:lstStyle/>
+          <a:p>
+            <a:pPr>
+              <a:spcAft>
+                <a:spcPts val="600"/>
+              </a:spcAft>
+            </a:pPr>
+            <a:r>
+              <a:rPr sz="1500">
+                <a:solidFill>
+                  <a:srgbClr val="22282E"/>
+                </a:solidFill>
+              </a:rPr>
               <a:t>•  Security Blue Team. Blue Team Level 1 (BTL1) — dominio Threat Intelligence.</a:t>
             </a:r>
           </a:p>
@@ -3644,6 +4170,81 @@
           </a:p>
         </p:txBody>
       </p:sp>
+    </p:spTree>
+  </p:cSld>
+  <p:clrMapOvr>
+    <a:masterClrMapping/>
+  </p:clrMapOvr>
+</p:sld>
+</file>
+
+<file path=ppt/slides/slide16.xml><?xml version="1.0" encoding="utf-8"?>
+<p:sld xmlns:a="http://schemas.openxmlformats.org/drawingml/2006/main" xmlns:p="http://schemas.openxmlformats.org/presentationml/2006/main" xmlns:r="http://schemas.openxmlformats.org/officeDocument/2006/relationships">
+  <p:cSld>
+    <p:spTree>
+      <p:nvGrpSpPr>
+        <p:cNvPr id="1" name=""/>
+        <p:cNvGrpSpPr/>
+        <p:nvPr/>
+      </p:nvGrpSpPr>
+      <p:grpSpPr/>
+      <p:sp>
+        <p:nvSpPr>
+          <p:cNvPr id="2" name="TextBox 1"/>
+          <p:cNvSpPr txBox="1"/>
+          <p:nvPr/>
+        </p:nvSpPr>
+        <p:spPr>
+          <a:xfrm>
+            <a:off x="457200" y="274320"/>
+            <a:ext cx="8229600" cy="640080"/>
+          </a:xfrm>
+          <a:prstGeom prst="rect">
+            <a:avLst/>
+          </a:prstGeom>
+          <a:noFill/>
+        </p:spPr>
+        <p:txBody>
+          <a:bodyPr wrap="square">
+            <a:spAutoFit/>
+          </a:bodyPr>
+          <a:lstStyle/>
+          <a:p>
+            <a:r>
+              <a:rPr sz="2200" b="1">
+                <a:solidFill>
+                  <a:srgbClr val="0B3D2E"/>
+                </a:solidFill>
+              </a:rPr>
+              <a:t>Diagrama de la clase</a:t>
+            </a:r>
+          </a:p>
+        </p:txBody>
+      </p:sp>
+      <p:pic>
+        <p:nvPicPr>
+          <p:cNvPr id="3" name="Picture 2" descr="aa514191108ed19e.png"/>
+          <p:cNvPicPr>
+            <a:picLocks noChangeAspect="1"/>
+          </p:cNvPicPr>
+          <p:nvPr/>
+        </p:nvPicPr>
+        <p:blipFill>
+          <a:blip r:embed="rId2"/>
+          <a:stretch>
+            <a:fillRect/>
+          </a:stretch>
+        </p:blipFill>
+        <p:spPr>
+          <a:xfrm>
+            <a:off x="457200" y="3308618"/>
+            <a:ext cx="8229600" cy="880844"/>
+          </a:xfrm>
+          <a:prstGeom prst="rect">
+            <a:avLst/>
+          </a:prstGeom>
+        </p:spPr>
+      </p:pic>
     </p:spTree>
   </p:cSld>
   <p:clrMapOvr>
@@ -3728,7 +4329,7 @@
                   <a:srgbClr val="22282E"/>
                 </a:solidFill>
               </a:rPr>
-              <a:t>•  Transformar datos sueltos de amenazas en inteligencia accionable que dirija la defensa. Esta clase cubre el ciclo de inteligencia, la diferencia entre IOCs e IOAs, la Pyramid of Pain, el consumo y producción de feeds mediante una TIP (Threat Intelligence Platform) como MISP, el mapeo a MITRE ATT&amp;CK y la aplicación del Diamond Model para caracterizar intrusiones. Es contenido puramente defensivo: entender al adversario para detectarlo y anticiparlo, no para imitarlo.</a:t>
+              <a:t>•  Transformar datos sueltos de amenazas en inteligencia accionable que dirija la defensa. Esta clase cubre el ciclo de inteligencia, la diferencia entre IOCs e IOAs, la Pyramid of Pain, el consumo y…</a:t>
             </a:r>
           </a:p>
         </p:txBody>
@@ -4122,7 +4723,7 @@
                   <a:srgbClr val="0B3D2E"/>
                 </a:solidFill>
               </a:rPr>
-              <a:t>📖 Definiciones y características</a:t>
+              <a:t>🧠 Modelo mental y caso de decisión</a:t>
             </a:r>
           </a:p>
         </p:txBody>
@@ -4160,97 +4761,22 @@
                   <a:srgbClr val="22282E"/>
                 </a:solidFill>
               </a:rPr>
-              <a:t>•  Ciclo de inteligencia: proceso de Dirección → Recolección → Procesamiento → Análisis → Difusión → Retroalimentación. Característica clave: es iterativo; sin dirección (requisitos) se recolecta ruido.</a:t>
-            </a:r>
-          </a:p>
-          <a:p>
-            <a:pPr>
-              <a:spcAft>
-                <a:spcPts val="600"/>
-              </a:spcAft>
-            </a:pPr>
-            <a:r>
-              <a:rPr sz="1500">
-                <a:solidFill>
-                  <a:srgbClr val="22282E"/>
-                </a:solidFill>
-              </a:rPr>
-              <a:t>•  IOC (Indicator of Compromise): evidencia observable de que algo ya ocurrió —hash, IP, dominio, mutex. Característica clave: es reactivo y volátil; el adversario lo cambia con facilidad.</a:t>
-            </a:r>
-          </a:p>
-          <a:p>
-            <a:pPr>
-              <a:spcAft>
-                <a:spcPts val="600"/>
-              </a:spcAft>
-            </a:pPr>
-            <a:r>
-              <a:rPr sz="1500">
-                <a:solidFill>
-                  <a:srgbClr val="22282E"/>
-                </a:solidFill>
-              </a:rPr>
-              <a:t>•  IOA (Indicator of Attack): comportamiento en curso que revela intención —p. ej. proceso de Office lanzando PowerShell codificado. Característica clave: es proactivo y más difícil de evadir porque describe cómo actúa el atacante.</a:t>
-            </a:r>
-          </a:p>
-          <a:p>
-            <a:pPr>
-              <a:spcAft>
-                <a:spcPts val="600"/>
-              </a:spcAft>
-            </a:pPr>
-            <a:r>
-              <a:rPr sz="1500">
-                <a:solidFill>
-                  <a:srgbClr val="22282E"/>
-                </a:solidFill>
-              </a:rPr>
-              <a:t>•  Pyramid of Pain (David Bianco): jerarquía de indicadores por el "dolor" que causa al adversario detectarlos: hash &lt; IP &lt; dominio &lt; artefactos de red/host &lt; herramientas &lt; TTPs. Característica clave: cuanto más arriba, más caro le resulta al atacante adaptarse.</a:t>
-            </a:r>
-          </a:p>
-          <a:p>
-            <a:pPr>
-              <a:spcAft>
-                <a:spcPts val="600"/>
-              </a:spcAft>
-            </a:pPr>
-            <a:r>
-              <a:rPr sz="1500">
-                <a:solidFill>
-                  <a:srgbClr val="22282E"/>
-                </a:solidFill>
-              </a:rPr>
-              <a:t>•  TIP (Threat Intelligence Platform): sistema que ingiere, normaliza, enriquece y comparte inteligencia (p. ej. MISP, OpenCTI). Característica clave: automatiza el flujo de feeds hacia los controles (SIEM, EDR, firewall).</a:t>
-            </a:r>
-          </a:p>
-          <a:p>
-            <a:pPr>
-              <a:spcAft>
-                <a:spcPts val="600"/>
-              </a:spcAft>
-            </a:pPr>
-            <a:r>
-              <a:rPr sz="1500">
-                <a:solidFill>
-                  <a:srgbClr val="22282E"/>
-                </a:solidFill>
-              </a:rPr>
-              <a:t>•  STIX / TAXII: STIX es el formato estructurado para describir amenazas; TAXII es el protocolo para transportarlo. Característica clave: permiten compartir inteligencia entre organizaciones de forma legible por máquina.</a:t>
-            </a:r>
-          </a:p>
-          <a:p>
-            <a:pPr>
-              <a:spcAft>
-                <a:spcPts val="600"/>
-              </a:spcAft>
-            </a:pPr>
-            <a:r>
-              <a:rPr sz="1500">
-                <a:solidFill>
-                  <a:srgbClr val="22282E"/>
-                </a:solidFill>
-              </a:rPr>
-              <a:t>•  MITRE ATT&amp;CK: base de conocimiento de tácticas (el por qué) y técnicas (el cómo) del adversario, con IDs (TA0001, T1059). Característica clave: es el lenguaje estándar para mapear TTPs y medir cobertura de detección.</a:t>
+              <a:t>•  Inteligencia reduce incertidumbre para una decisión; indicadores caducan y las hipótesis deben competir.</a:t>
+            </a:r>
+          </a:p>
+          <a:p>
+            <a:pPr>
+              <a:spcAft>
+                <a:spcPts val="600"/>
+              </a:spcAft>
+            </a:pPr>
+            <a:r>
+              <a:rPr sz="1500">
+                <a:solidFill>
+                  <a:srgbClr val="22282E"/>
+                </a:solidFill>
+              </a:rPr>
+              <a:t>•  Caso razonado. Diez fuentes copian el mismo IOC. Se cuenta una raíz y se calibra confianza.</a:t>
             </a:r>
           </a:p>
         </p:txBody>
@@ -4301,7 +4827,7 @@
                   <a:srgbClr val="0B3D2E"/>
                 </a:solidFill>
               </a:rPr>
-              <a:t>🧰 Herramientas y preparación</a:t>
+              <a:t>📔 Glosario operativo complementario</a:t>
             </a:r>
           </a:p>
         </p:txBody>
@@ -4339,82 +4865,52 @@
                   <a:srgbClr val="22282E"/>
                 </a:solidFill>
               </a:rPr>
-              <a:t>•  Entorno de laboratorio propio y aislado; solo se consume inteligencia pública o ficticia:</a:t>
-            </a:r>
-          </a:p>
-          <a:p>
-            <a:pPr>
-              <a:spcAft>
-                <a:spcPts val="600"/>
-              </a:spcAft>
-            </a:pPr>
-            <a:r>
-              <a:rPr sz="1500">
-                <a:solidFill>
-                  <a:srgbClr val="22282E"/>
-                </a:solidFill>
-              </a:rPr>
-              <a:t>•  MISP (máquina virtual o contenedor oficial) para gestionar eventos, atributos y feeds.</a:t>
-            </a:r>
-          </a:p>
-          <a:p>
-            <a:pPr>
-              <a:spcAft>
-                <a:spcPts val="600"/>
-              </a:spcAft>
-            </a:pPr>
-            <a:r>
-              <a:rPr sz="1500">
-                <a:solidFill>
-                  <a:srgbClr val="22282E"/>
-                </a:solidFill>
-              </a:rPr>
-              <a:t>•  MITRE ATT&amp;CK Navigator para construir capas (layers) de cobertura y superponer grupos.</a:t>
-            </a:r>
-          </a:p>
-          <a:p>
-            <a:pPr>
-              <a:spcAft>
-                <a:spcPts val="600"/>
-              </a:spcAft>
-            </a:pPr>
-            <a:r>
-              <a:rPr sz="1500">
-                <a:solidFill>
-                  <a:srgbClr val="22282E"/>
-                </a:solidFill>
-              </a:rPr>
-              <a:t>•  Fuentes abiertas de ejemplo: feeds públicos de MISP, CISA Advisories, informes de proveedores (solo lectura para el ejercicio).</a:t>
-            </a:r>
-          </a:p>
-          <a:p>
-            <a:pPr>
-              <a:spcAft>
-                <a:spcPts val="600"/>
-              </a:spcAft>
-            </a:pPr>
-            <a:r>
-              <a:rPr sz="1500">
-                <a:solidFill>
-                  <a:srgbClr val="22282E"/>
-                </a:solidFill>
-              </a:rPr>
-              <a:t>•  Hoja de cálculo para el mapeo TTP ↔ detección ↔ fuente de log.</a:t>
-            </a:r>
-          </a:p>
-          <a:p>
-            <a:pPr>
-              <a:spcAft>
-                <a:spcPts val="600"/>
-              </a:spcAft>
-            </a:pPr>
-            <a:r>
-              <a:rPr sz="1500">
-                <a:solidFill>
-                  <a:srgbClr val="22282E"/>
-                </a:solidFill>
-              </a:rPr>
-              <a:t>•  Editor de texto / JSON para inspeccionar objetos STIX de ejemplo.</a:t>
+              <a:t>•  Término — Definición</a:t>
+            </a:r>
+          </a:p>
+          <a:p>
+            <a:pPr>
+              <a:spcAft>
+                <a:spcPts val="600"/>
+              </a:spcAft>
+            </a:pPr>
+            <a:r>
+              <a:rPr sz="1500">
+                <a:solidFill>
+                  <a:srgbClr val="22282E"/>
+                </a:solidFill>
+              </a:rPr>
+              <a:t>•  Evidencia — Información cuya procedencia y relación con un criterio pueden revisarse.</a:t>
+            </a:r>
+          </a:p>
+          <a:p>
+            <a:pPr>
+              <a:spcAft>
+                <a:spcPts val="600"/>
+              </a:spcAft>
+            </a:pPr>
+            <a:r>
+              <a:rPr sz="1500">
+                <a:solidFill>
+                  <a:srgbClr val="22282E"/>
+                </a:solidFill>
+              </a:rPr>
+              <a:t>•  Supuesto — Condición declarada de la que depende una conclusión.</a:t>
+            </a:r>
+          </a:p>
+          <a:p>
+            <a:pPr>
+              <a:spcAft>
+                <a:spcPts val="600"/>
+              </a:spcAft>
+            </a:pPr>
+            <a:r>
+              <a:rPr sz="1500">
+                <a:solidFill>
+                  <a:srgbClr val="22282E"/>
+                </a:solidFill>
+              </a:rPr>
+              <a:t>•  Riesgo residual — Exposición que permanece después del tratamiento.</a:t>
             </a:r>
           </a:p>
         </p:txBody>
@@ -4465,7 +4961,7 @@
                   <a:srgbClr val="0B3D2E"/>
                 </a:solidFill>
               </a:rPr>
-              <a:t>🧪 Laboratorio guiado — Construir un playbook de threat intelligence</a:t>
+              <a:t>✅ Criterio de dominio</a:t>
             </a:r>
           </a:p>
         </p:txBody>
@@ -4503,97 +4999,7 @@
                   <a:srgbClr val="22282E"/>
                 </a:solidFill>
               </a:rPr>
-              <a:t>•  Ejercicio aplicado: a partir de un informe público de un grupo (ficticio o de ejemplo), produces un playbook de TI completo.</a:t>
-            </a:r>
-          </a:p>
-          <a:p>
-            <a:pPr>
-              <a:spcAft>
-                <a:spcPts val="600"/>
-              </a:spcAft>
-            </a:pPr>
-            <a:r>
-              <a:rPr sz="1500">
-                <a:solidFill>
-                  <a:srgbClr val="22282E"/>
-                </a:solidFill>
-              </a:rPr>
-              <a:t>•  Define los requisitos (Dirección). Escribe la pregunta de inteligencia: p. ej. "¿Está mi organización expuesta a las técnicas del grupo APT-X que ataca al sector financiero?". Sin esto, todo lo demás es ruido.</a:t>
-            </a:r>
-          </a:p>
-          <a:p>
-            <a:pPr>
-              <a:spcAft>
-                <a:spcPts val="600"/>
-              </a:spcAft>
-            </a:pPr>
-            <a:r>
-              <a:rPr sz="1500">
-                <a:solidFill>
-                  <a:srgbClr val="22282E"/>
-                </a:solidFill>
-              </a:rPr>
-              <a:t>•  Recolecta. Reúne el informe/CTI de ejemplo y extrae indicadores y comportamientos. Separa lo observable (IOCs) de los comportamientos (IOAs).</a:t>
-            </a:r>
-          </a:p>
-          <a:p>
-            <a:pPr>
-              <a:spcAft>
-                <a:spcPts val="600"/>
-              </a:spcAft>
-            </a:pPr>
-            <a:r>
-              <a:rPr sz="1500">
-                <a:solidFill>
-                  <a:srgbClr val="22282E"/>
-                </a:solidFill>
-              </a:rPr>
-              <a:t>•  Procesa en MISP. Crea un evento, añade atributos (dominios, hashes, IPs de ejemplo), etiqueta con taxonomías (tlp:amber, kill-chain) y galaxias (grupo/ATT&amp;CK).</a:t>
-            </a:r>
-          </a:p>
-          <a:p>
-            <a:pPr>
-              <a:spcAft>
-                <a:spcPts val="600"/>
-              </a:spcAft>
-            </a:pPr>
-            <a:r>
-              <a:rPr sz="1500">
-                <a:solidFill>
-                  <a:srgbClr val="22282E"/>
-                </a:solidFill>
-              </a:rPr>
-              <a:t>•  Analiza con la Pyramid of Pain. Clasifica cada indicador por nivel y decide dónde invertir: bloquear hashes es barato para el atacante; detectar TTPs le duele. Prioriza detecciones de comportamiento.</a:t>
-            </a:r>
-          </a:p>
-          <a:p>
-            <a:pPr>
-              <a:spcAft>
-                <a:spcPts val="600"/>
-              </a:spcAft>
-            </a:pPr>
-            <a:r>
-              <a:rPr sz="1500">
-                <a:solidFill>
-                  <a:srgbClr val="22282E"/>
-                </a:solidFill>
-              </a:rPr>
-              <a:t>•  Mapea a MITRE ATT&amp;CK. Lista las técnicas observadas (p. ej. T1566 phishing, T1059.001 PowerShell, T1486 cifrado). Construye una capa en ATT&amp;CK Navigator.</a:t>
-            </a:r>
-          </a:p>
-          <a:p>
-            <a:pPr>
-              <a:spcAft>
-                <a:spcPts val="600"/>
-              </a:spcAft>
-            </a:pPr>
-            <a:r>
-              <a:rPr sz="1500">
-                <a:solidFill>
-                  <a:srgbClr val="22282E"/>
-                </a:solidFill>
-              </a:rPr>
-              <a:t>•  Cruza con tu telemetría. Para cada técnica, anota qué fuente de log/regla la detectaría (EDR, Sysmon, proxy). Marca huecos de cobertura.</a:t>
+              <a:t>•  El alumno demuestra dominio cuando explica el diagrama, resuelve el caso con evidencia, declara límites y puede defender por qué su decisión cambia si cambia un supuesto.</a:t>
             </a:r>
           </a:p>
         </p:txBody>
@@ -4644,7 +5050,7 @@
                   <a:srgbClr val="0B3D2E"/>
                 </a:solidFill>
               </a:rPr>
-              <a:t>✍️ Ejercicios</a:t>
+              <a:t>📖 Definiciones y características</a:t>
             </a:r>
           </a:p>
         </p:txBody>
@@ -4682,82 +5088,97 @@
                   <a:srgbClr val="22282E"/>
                 </a:solidFill>
               </a:rPr>
-              <a:t>•  Clasifica diez indicadores dados como IOC o IOA y justifica cada uno.</a:t>
-            </a:r>
-          </a:p>
-          <a:p>
-            <a:pPr>
-              <a:spcAft>
-                <a:spcPts val="600"/>
-              </a:spcAft>
-            </a:pPr>
-            <a:r>
-              <a:rPr sz="1500">
-                <a:solidFill>
-                  <a:srgbClr val="22282E"/>
-                </a:solidFill>
-              </a:rPr>
-              <a:t>•  Ubica cinco indicadores en la Pyramid of Pain y explica la prioridad de defensa resultante.</a:t>
-            </a:r>
-          </a:p>
-          <a:p>
-            <a:pPr>
-              <a:spcAft>
-                <a:spcPts val="600"/>
-              </a:spcAft>
-            </a:pPr>
-            <a:r>
-              <a:rPr sz="1500">
-                <a:solidFill>
-                  <a:srgbClr val="22282E"/>
-                </a:solidFill>
-              </a:rPr>
-              <a:t>•  Crea un evento MISP con al menos cinco atributos, dos etiquetas de taxonomía y una galaxia de ATT&amp;CK.</a:t>
-            </a:r>
-          </a:p>
-          <a:p>
-            <a:pPr>
-              <a:spcAft>
-                <a:spcPts val="600"/>
-              </a:spcAft>
-            </a:pPr>
-            <a:r>
-              <a:rPr sz="1500">
-                <a:solidFill>
-                  <a:srgbClr val="22282E"/>
-                </a:solidFill>
-              </a:rPr>
-              <a:t>•  Mapea un informe de amenazas a seis técnicas de ATT&amp;CK y construye la capa en Navigator.</a:t>
-            </a:r>
-          </a:p>
-          <a:p>
-            <a:pPr>
-              <a:spcAft>
-                <a:spcPts val="600"/>
-              </a:spcAft>
-            </a:pPr>
-            <a:r>
-              <a:rPr sz="1500">
-                <a:solidFill>
-                  <a:srgbClr val="22282E"/>
-                </a:solidFill>
-              </a:rPr>
-              <a:t>•  Rellena un Diamond Model para una intrusión de ejemplo y describe un pivote posible por infraestructura.</a:t>
-            </a:r>
-          </a:p>
-          <a:p>
-            <a:pPr>
-              <a:spcAft>
-                <a:spcPts val="600"/>
-              </a:spcAft>
-            </a:pPr>
-            <a:r>
-              <a:rPr sz="1500">
-                <a:solidFill>
-                  <a:srgbClr val="22282E"/>
-                </a:solidFill>
-              </a:rPr>
-              <a:t>•  Redacta un producto de inteligencia estratégico (media página) para la dirección a partir de un informe táctico.</a:t>
+              <a:t>•  Ciclo de inteligencia: proceso de Dirección → Recolección → Procesamiento → Análisis → Difusión → Retroalimentación. Característica clave: es iterativo; sin dirección (requisitos) se recolecta ruido.</a:t>
+            </a:r>
+          </a:p>
+          <a:p>
+            <a:pPr>
+              <a:spcAft>
+                <a:spcPts val="600"/>
+              </a:spcAft>
+            </a:pPr>
+            <a:r>
+              <a:rPr sz="1500">
+                <a:solidFill>
+                  <a:srgbClr val="22282E"/>
+                </a:solidFill>
+              </a:rPr>
+              <a:t>•  IOC (Indicator of Compromise): evidencia observable de que algo ya ocurrió —hash, IP, dominio, mutex. Característica clave: es reactivo y volátil; el adversario lo cambia con facilidad.</a:t>
+            </a:r>
+          </a:p>
+          <a:p>
+            <a:pPr>
+              <a:spcAft>
+                <a:spcPts val="600"/>
+              </a:spcAft>
+            </a:pPr>
+            <a:r>
+              <a:rPr sz="1500">
+                <a:solidFill>
+                  <a:srgbClr val="22282E"/>
+                </a:solidFill>
+              </a:rPr>
+              <a:t>•  IOA (Indicator of Attack): comportamiento en curso que revela intención —p. ej. proceso de Office lanzando PowerShell codificado. Característica clave: es proactivo y más difícil de evadir porque…</a:t>
+            </a:r>
+          </a:p>
+          <a:p>
+            <a:pPr>
+              <a:spcAft>
+                <a:spcPts val="600"/>
+              </a:spcAft>
+            </a:pPr>
+            <a:r>
+              <a:rPr sz="1500">
+                <a:solidFill>
+                  <a:srgbClr val="22282E"/>
+                </a:solidFill>
+              </a:rPr>
+              <a:t>•  Pyramid of Pain (David Bianco): jerarquía de indicadores por el "dolor" que causa al adversario detectarlos: hash &lt; IP &lt; dominio &lt; artefactos de red/host &lt; herramientas &lt; TTPs. Característica clave…</a:t>
+            </a:r>
+          </a:p>
+          <a:p>
+            <a:pPr>
+              <a:spcAft>
+                <a:spcPts val="600"/>
+              </a:spcAft>
+            </a:pPr>
+            <a:r>
+              <a:rPr sz="1500">
+                <a:solidFill>
+                  <a:srgbClr val="22282E"/>
+                </a:solidFill>
+              </a:rPr>
+              <a:t>•  TIP (Threat Intelligence Platform): sistema que ingiere, normaliza, enriquece y comparte inteligencia (p. ej. MISP, OpenCTI). Característica clave: automatiza el flujo de feeds hacia los controles…</a:t>
+            </a:r>
+          </a:p>
+          <a:p>
+            <a:pPr>
+              <a:spcAft>
+                <a:spcPts val="600"/>
+              </a:spcAft>
+            </a:pPr>
+            <a:r>
+              <a:rPr sz="1500">
+                <a:solidFill>
+                  <a:srgbClr val="22282E"/>
+                </a:solidFill>
+              </a:rPr>
+              <a:t>•  STIX / TAXII: STIX es el formato estructurado para describir amenazas; TAXII es el protocolo para transportarlo. Característica clave: permiten compartir inteligencia entre organizaciones de forma…</a:t>
+            </a:r>
+          </a:p>
+          <a:p>
+            <a:pPr>
+              <a:spcAft>
+                <a:spcPts val="600"/>
+              </a:spcAft>
+            </a:pPr>
+            <a:r>
+              <a:rPr sz="1500">
+                <a:solidFill>
+                  <a:srgbClr val="22282E"/>
+                </a:solidFill>
+              </a:rPr>
+              <a:t>•  MITRE ATT&amp;CK: base de conocimiento de tácticas (el por qué) y técnicas (el cómo) del adversario, con IDs (TA0001, T1059). Característica clave: es el lenguaje estándar para mapear TTPs y medir…</a:t>
             </a:r>
           </a:p>
         </p:txBody>
@@ -4808,7 +5229,7 @@
                   <a:srgbClr val="0B3D2E"/>
                 </a:solidFill>
               </a:rPr>
-              <a:t>📝 Reto verificable</a:t>
+              <a:t>🧰 Herramientas y preparación</a:t>
             </a:r>
           </a:p>
         </p:txBody>
@@ -4846,97 +5267,82 @@
                   <a:srgbClr val="22282E"/>
                 </a:solidFill>
               </a:rPr>
-              <a:t>•  Reto: entrega un playbook de threat intelligence que convierta un informe de amenazas en detecciones y en productos para tres audiencias.</a:t>
-            </a:r>
-          </a:p>
-          <a:p>
-            <a:pPr>
-              <a:spcAft>
-                <a:spcPts val="600"/>
-              </a:spcAft>
-            </a:pPr>
-            <a:r>
-              <a:rPr sz="1500">
-                <a:solidFill>
-                  <a:srgbClr val="22282E"/>
-                </a:solidFill>
-              </a:rPr>
-              <a:t>•  Criterio de aceptación:</a:t>
-            </a:r>
-          </a:p>
-          <a:p>
-            <a:pPr>
-              <a:spcAft>
-                <a:spcPts val="600"/>
-              </a:spcAft>
-            </a:pPr>
-            <a:r>
-              <a:rPr sz="1500">
-                <a:solidFill>
-                  <a:srgbClr val="22282E"/>
-                </a:solidFill>
-              </a:rPr>
-              <a:t>•  El playbook parte de un requisito de inteligencia explícito (fase de Dirección).</a:t>
-            </a:r>
-          </a:p>
-          <a:p>
-            <a:pPr>
-              <a:spcAft>
-                <a:spcPts val="600"/>
-              </a:spcAft>
-            </a:pPr>
-            <a:r>
-              <a:rPr sz="1500">
-                <a:solidFill>
-                  <a:srgbClr val="22282E"/>
-                </a:solidFill>
-              </a:rPr>
-              <a:t>•  Los indicadores están separados en IOCs e IOAs y clasificados en la Pyramid of Pain con prioridad justificada.</a:t>
-            </a:r>
-          </a:p>
-          <a:p>
-            <a:pPr>
-              <a:spcAft>
-                <a:spcPts val="600"/>
-              </a:spcAft>
-            </a:pPr>
-            <a:r>
-              <a:rPr sz="1500">
-                <a:solidFill>
-                  <a:srgbClr val="22282E"/>
-                </a:solidFill>
-              </a:rPr>
-              <a:t>•  Existe un evento MISP con atributos, taxonomías (TLP) y galaxia de ATT&amp;CK.</a:t>
-            </a:r>
-          </a:p>
-          <a:p>
-            <a:pPr>
-              <a:spcAft>
-                <a:spcPts val="600"/>
-              </a:spcAft>
-            </a:pPr>
-            <a:r>
-              <a:rPr sz="1500">
-                <a:solidFill>
-                  <a:srgbClr val="22282E"/>
-                </a:solidFill>
-              </a:rPr>
-              <a:t>•  Hay una capa de MITRE ATT&amp;CK con al menos seis técnicas y su fuente de detección, señalando huecos de cobertura.</a:t>
-            </a:r>
-          </a:p>
-          <a:p>
-            <a:pPr>
-              <a:spcAft>
-                <a:spcPts val="600"/>
-              </a:spcAft>
-            </a:pPr>
-            <a:r>
-              <a:rPr sz="1500">
-                <a:solidFill>
-                  <a:srgbClr val="22282E"/>
-                </a:solidFill>
-              </a:rPr>
-              <a:t>•  Se incluye un Diamond Model con los cuatro vértices y un pivote propuesto, más tres productos de inteligencia (táctico, operacional, estratégico).</a:t>
+              <a:t>•  Entorno de laboratorio propio y aislado; solo se consume inteligencia pública o ficticia:</a:t>
+            </a:r>
+          </a:p>
+          <a:p>
+            <a:pPr>
+              <a:spcAft>
+                <a:spcPts val="600"/>
+              </a:spcAft>
+            </a:pPr>
+            <a:r>
+              <a:rPr sz="1500">
+                <a:solidFill>
+                  <a:srgbClr val="22282E"/>
+                </a:solidFill>
+              </a:rPr>
+              <a:t>•  MISP (máquina virtual o contenedor oficial) para gestionar eventos, atributos y feeds.</a:t>
+            </a:r>
+          </a:p>
+          <a:p>
+            <a:pPr>
+              <a:spcAft>
+                <a:spcPts val="600"/>
+              </a:spcAft>
+            </a:pPr>
+            <a:r>
+              <a:rPr sz="1500">
+                <a:solidFill>
+                  <a:srgbClr val="22282E"/>
+                </a:solidFill>
+              </a:rPr>
+              <a:t>•  MITRE ATT&amp;CK Navigator para construir capas (layers) de cobertura y superponer grupos.</a:t>
+            </a:r>
+          </a:p>
+          <a:p>
+            <a:pPr>
+              <a:spcAft>
+                <a:spcPts val="600"/>
+              </a:spcAft>
+            </a:pPr>
+            <a:r>
+              <a:rPr sz="1500">
+                <a:solidFill>
+                  <a:srgbClr val="22282E"/>
+                </a:solidFill>
+              </a:rPr>
+              <a:t>•  Fuentes abiertas de ejemplo: feeds públicos de MISP, CISA Advisories, informes de proveedores (solo lectura para el ejercicio).</a:t>
+            </a:r>
+          </a:p>
+          <a:p>
+            <a:pPr>
+              <a:spcAft>
+                <a:spcPts val="600"/>
+              </a:spcAft>
+            </a:pPr>
+            <a:r>
+              <a:rPr sz="1500">
+                <a:solidFill>
+                  <a:srgbClr val="22282E"/>
+                </a:solidFill>
+              </a:rPr>
+              <a:t>•  Hoja de cálculo para el mapeo TTP ↔ detección ↔ fuente de log.</a:t>
+            </a:r>
+          </a:p>
+          <a:p>
+            <a:pPr>
+              <a:spcAft>
+                <a:spcPts val="600"/>
+              </a:spcAft>
+            </a:pPr>
+            <a:r>
+              <a:rPr sz="1500">
+                <a:solidFill>
+                  <a:srgbClr val="22282E"/>
+                </a:solidFill>
+              </a:rPr>
+              <a:t>•  Editor de texto / JSON para inspeccionar objetos STIX de ejemplo.</a:t>
             </a:r>
           </a:p>
         </p:txBody>
